--- a/docs/lectures/09_16_multivariate_statistics/multivariate_statistics.pptx
+++ b/docs/lectures/09_16_multivariate_statistics/multivariate_statistics.pptx
@@ -16076,16 +16076,16 @@
 ## [1] "darl_scaled ~ site , strata = Null , permutations 999"
 ## 
 ## $TJH_vs_DG
-##          Df SumOfSqs      R2      F Pr(&gt;F)    
-## Model     1   32.602 0.10636 5.7128  0.001 ***
-## Residual 48  273.930 0.89364                  
-## Total    49  306.532 1.00000                  
+##          Df SumOfSqs      R2      F Pr(&gt;F)   
+## Model     1   32.602 0.10636 5.7128  0.002 **
+## Residual 48  273.930 0.89364                 
+## Total    49  306.532 1.00000                 
 ## ---
 ## Signif. codes:  0 '***' 0.001 '**' 0.01 '*' 0.05 '.' 0.1 ' ' 1
 ## 
 ## $TJH_vs_LEH
 ##          Df SumOfSqs      R2      F Pr(&gt;F)   
-## Model     1    47.72 0.10517 5.6414  0.005 **
+## Model     1    47.72 0.10517 5.6414  0.004 **
 ## Residual 48   406.06 0.89483                 
 ## Total    49   453.78 1.00000                 
 ## ---
@@ -16101,7 +16101,7 @@
 ## 
 ## $DG_vs_LEH
 ##          Df SumOfSqs      R2      F Pr(&gt;F)  
-## Model     1    26.24 0.06493 3.3333  0.022 *
+## Model     1    26.24 0.06493 3.3333  0.016 *
 ## Residual 48   377.85 0.93507                
 ## Total    49   404.09 1.00000                
 ## ---
@@ -16143,8 +16143,8 @@
 ## 
 ##     DG    HD    LEH  
 ## HD  0.006 -     -    
-## LEH 0.072 0.006 -    
-## TJH 0.006 0.006 0.012
+## LEH 0.090 0.006 -    
+## TJH 0.006 0.006 0.030
 ## 
 ## P value adjustment method: bonferroni</a:t>
             </a:r>

--- a/docs/lectures/09_16_multivariate_statistics/multivariate_statistics.pptx
+++ b/docs/lectures/09_16_multivariate_statistics/multivariate_statistics.pptx
@@ -16076,10 +16076,10 @@
 ## [1] "darl_scaled ~ site , strata = Null , permutations 999"
 ## 
 ## $TJH_vs_DG
-##          Df SumOfSqs      R2      F Pr(&gt;F)   
-## Model     1   32.602 0.10636 5.7128  0.002 **
-## Residual 48  273.930 0.89364                 
-## Total    49  306.532 1.00000                 
+##          Df SumOfSqs      R2      F Pr(&gt;F)    
+## Model     1   32.602 0.10636 5.7128  0.001 ***
+## Residual 48  273.930 0.89364                  
+## Total    49  306.532 1.00000                  
 ## ---
 ## Signif. codes:  0 '***' 0.001 '**' 0.01 '*' 0.05 '.' 0.1 ' ' 1
 ## 
@@ -16101,7 +16101,7 @@
 ## 
 ## $DG_vs_LEH
 ##          Df SumOfSqs      R2      F Pr(&gt;F)  
-## Model     1    26.24 0.06493 3.3333  0.016 *
+## Model     1    26.24 0.06493 3.3333  0.022 *
 ## Residual 48   377.85 0.93507                
 ## Total    49   404.09 1.00000                
 ## ---
@@ -16143,8 +16143,8 @@
 ## 
 ##     DG    HD    LEH  
 ## HD  0.006 -     -    
-## LEH 0.090 0.006 -    
-## TJH 0.006 0.006 0.030
+## LEH 0.102 0.006 -    
+## TJH 0.024 0.006 0.006
 ## 
 ## P value adjustment method: bonferroni</a:t>
             </a:r>

--- a/docs/lectures/09_16_multivariate_statistics/multivariate_statistics.pptx
+++ b/docs/lectures/09_16_multivariate_statistics/multivariate_statistics.pptx
@@ -16076,16 +16076,16 @@
 ## [1] "darl_scaled ~ site , strata = Null , permutations 999"
 ## 
 ## $TJH_vs_DG
-##          Df SumOfSqs      R2      F Pr(&gt;F)    
-## Model     1   32.602 0.10636 5.7128  0.001 ***
-## Residual 48  273.930 0.89364                  
-## Total    49  306.532 1.00000                  
+##          Df SumOfSqs      R2      F Pr(&gt;F)   
+## Model     1   32.602 0.10636 5.7128  0.004 **
+## Residual 48  273.930 0.89364                 
+## Total    49  306.532 1.00000                 
 ## ---
 ## Signif. codes:  0 '***' 0.001 '**' 0.01 '*' 0.05 '.' 0.1 ' ' 1
 ## 
 ## $TJH_vs_LEH
 ##          Df SumOfSqs      R2      F Pr(&gt;F)   
-## Model     1    47.72 0.10517 5.6414  0.004 **
+## Model     1    47.72 0.10517 5.6414  0.002 **
 ## Residual 48   406.06 0.89483                 
 ## Total    49   453.78 1.00000                 
 ## ---
@@ -16101,7 +16101,7 @@
 ## 
 ## $DG_vs_LEH
 ##          Df SumOfSqs      R2      F Pr(&gt;F)  
-## Model     1    26.24 0.06493 3.3333  0.022 *
+## Model     1    26.24 0.06493 3.3333  0.015 *
 ## Residual 48   377.85 0.93507                
 ## Total    49   404.09 1.00000                
 ## ---
@@ -16143,8 +16143,8 @@
 ## 
 ##     DG    HD    LEH  
 ## HD  0.006 -     -    
-## LEH 0.102 0.006 -    
-## TJH 0.024 0.006 0.006
+## LEH 0.138 0.006 -    
+## TJH 0.012 0.006 0.018
 ## 
 ## P value adjustment method: bonferroni</a:t>
             </a:r>
